--- a/Howard_Liao_CISO_10Min_Executive_Presentation.pptx
+++ b/Howard_Liao_CISO_10Min_Executive_Presentation.pptx
@@ -3976,7 +3976,7 @@
               </a:defRPr>
             </a:pPr>
             <a:r>
-              <a:t>🏬 2011–2014: 光南集團 (上市櫃) 資訊經理/轉型主管</a:t>
+              <a:t>🏬 2011–2014: 光男集團 (上市櫃) 資訊經理/轉型主管</a:t>
             </a:r>
             <a:br/>
             <a:r>
